--- a/ParallelLSTM/result/성능개선 6 결과.pptx
+++ b/ParallelLSTM/result/성능개선 6 결과.pptx
@@ -279,7 +279,7 @@
           <a:p>
             <a:fld id="{B72759B8-7332-44BD-B1FF-13450B6DA7DC}" type="datetimeFigureOut">
               <a:rPr lang="ko-KR" altLang="en-US" smtClean="0"/>
-              <a:t>2026-01-29</a:t>
+              <a:t>2026-01-30</a:t>
             </a:fld>
             <a:endParaRPr lang="ko-KR" altLang="en-US"/>
           </a:p>
@@ -449,7 +449,7 @@
           <a:p>
             <a:fld id="{B72759B8-7332-44BD-B1FF-13450B6DA7DC}" type="datetimeFigureOut">
               <a:rPr lang="ko-KR" altLang="en-US" smtClean="0"/>
-              <a:t>2026-01-29</a:t>
+              <a:t>2026-01-30</a:t>
             </a:fld>
             <a:endParaRPr lang="ko-KR" altLang="en-US"/>
           </a:p>
@@ -629,7 +629,7 @@
           <a:p>
             <a:fld id="{B72759B8-7332-44BD-B1FF-13450B6DA7DC}" type="datetimeFigureOut">
               <a:rPr lang="ko-KR" altLang="en-US" smtClean="0"/>
-              <a:t>2026-01-29</a:t>
+              <a:t>2026-01-30</a:t>
             </a:fld>
             <a:endParaRPr lang="ko-KR" altLang="en-US"/>
           </a:p>
@@ -799,7 +799,7 @@
           <a:p>
             <a:fld id="{B72759B8-7332-44BD-B1FF-13450B6DA7DC}" type="datetimeFigureOut">
               <a:rPr lang="ko-KR" altLang="en-US" smtClean="0"/>
-              <a:t>2026-01-29</a:t>
+              <a:t>2026-01-30</a:t>
             </a:fld>
             <a:endParaRPr lang="ko-KR" altLang="en-US"/>
           </a:p>
@@ -1050,7 +1050,7 @@
           <a:p>
             <a:fld id="{B72759B8-7332-44BD-B1FF-13450B6DA7DC}" type="datetimeFigureOut">
               <a:rPr lang="ko-KR" altLang="en-US" smtClean="0"/>
-              <a:t>2026-01-29</a:t>
+              <a:t>2026-01-30</a:t>
             </a:fld>
             <a:endParaRPr lang="ko-KR" altLang="en-US"/>
           </a:p>
@@ -1282,7 +1282,7 @@
           <a:p>
             <a:fld id="{B72759B8-7332-44BD-B1FF-13450B6DA7DC}" type="datetimeFigureOut">
               <a:rPr lang="ko-KR" altLang="en-US" smtClean="0"/>
-              <a:t>2026-01-29</a:t>
+              <a:t>2026-01-30</a:t>
             </a:fld>
             <a:endParaRPr lang="ko-KR" altLang="en-US"/>
           </a:p>
@@ -1629,7 +1629,7 @@
           <a:p>
             <a:fld id="{B72759B8-7332-44BD-B1FF-13450B6DA7DC}" type="datetimeFigureOut">
               <a:rPr lang="ko-KR" altLang="en-US" smtClean="0"/>
-              <a:t>2026-01-29</a:t>
+              <a:t>2026-01-30</a:t>
             </a:fld>
             <a:endParaRPr lang="ko-KR" altLang="en-US"/>
           </a:p>
@@ -1747,7 +1747,7 @@
           <a:p>
             <a:fld id="{B72759B8-7332-44BD-B1FF-13450B6DA7DC}" type="datetimeFigureOut">
               <a:rPr lang="ko-KR" altLang="en-US" smtClean="0"/>
-              <a:t>2026-01-29</a:t>
+              <a:t>2026-01-30</a:t>
             </a:fld>
             <a:endParaRPr lang="ko-KR" altLang="en-US"/>
           </a:p>
@@ -1865,7 +1865,7 @@
           <a:p>
             <a:fld id="{B72759B8-7332-44BD-B1FF-13450B6DA7DC}" type="datetimeFigureOut">
               <a:rPr lang="ko-KR" altLang="en-US" smtClean="0"/>
-              <a:t>2026-01-29</a:t>
+              <a:t>2026-01-30</a:t>
             </a:fld>
             <a:endParaRPr lang="ko-KR" altLang="en-US"/>
           </a:p>
@@ -2149,7 +2149,7 @@
           <a:p>
             <a:fld id="{B72759B8-7332-44BD-B1FF-13450B6DA7DC}" type="datetimeFigureOut">
               <a:rPr lang="ko-KR" altLang="en-US" smtClean="0"/>
-              <a:t>2026-01-29</a:t>
+              <a:t>2026-01-30</a:t>
             </a:fld>
             <a:endParaRPr lang="ko-KR" altLang="en-US"/>
           </a:p>
@@ -2413,7 +2413,7 @@
           <a:p>
             <a:fld id="{B72759B8-7332-44BD-B1FF-13450B6DA7DC}" type="datetimeFigureOut">
               <a:rPr lang="ko-KR" altLang="en-US" smtClean="0"/>
-              <a:t>2026-01-29</a:t>
+              <a:t>2026-01-30</a:t>
             </a:fld>
             <a:endParaRPr lang="ko-KR" altLang="en-US"/>
           </a:p>
@@ -2627,7 +2627,7 @@
           <a:p>
             <a:fld id="{B72759B8-7332-44BD-B1FF-13450B6DA7DC}" type="datetimeFigureOut">
               <a:rPr lang="ko-KR" altLang="en-US" smtClean="0"/>
-              <a:t>2026-01-29</a:t>
+              <a:t>2026-01-30</a:t>
             </a:fld>
             <a:endParaRPr lang="ko-KR" altLang="en-US"/>
           </a:p>
@@ -6913,7 +6913,7 @@
           <p:nvPr>
             <p:extLst>
               <p:ext uri="{D42A27DB-BD31-4B8C-83A1-F6EECF244321}">
-                <p14:modId xmlns:p14="http://schemas.microsoft.com/office/powerpoint/2010/main" val="3980464816"/>
+                <p14:modId xmlns:p14="http://schemas.microsoft.com/office/powerpoint/2010/main" val="1145876216"/>
               </p:ext>
             </p:extLst>
           </p:nvPr>
@@ -7348,7 +7348,11 @@
                         <a:defRPr/>
                       </a:pPr>
                       <a:r>
-                        <a:rPr lang="en-US" altLang="ko-KR" sz="1100" dirty="0"/>
+                        <a:rPr lang="en-US" altLang="ko-KR" sz="1100" dirty="0">
+                          <a:solidFill>
+                            <a:srgbClr val="FF0000"/>
+                          </a:solidFill>
+                        </a:rPr>
                         <a:t>-0.68</a:t>
                       </a:r>
                       <a:r>
@@ -7357,7 +7361,7 @@
                             <a:noFill/>
                           </a:ln>
                           <a:solidFill>
-                            <a:prstClr val="black"/>
+                            <a:srgbClr val="FF0000"/>
                           </a:solidFill>
                           <a:effectLst/>
                           <a:uLnTx/>
@@ -7369,7 +7373,11 @@
                         <a:t> ( </a:t>
                       </a:r>
                       <a:r>
-                        <a:rPr lang="en-US" altLang="ko-KR" sz="1100" dirty="0"/>
+                        <a:rPr lang="en-US" altLang="ko-KR" sz="1100" dirty="0">
+                          <a:solidFill>
+                            <a:srgbClr val="FF0000"/>
+                          </a:solidFill>
+                        </a:rPr>
                         <a:t>81.1</a:t>
                       </a:r>
                       <a:r>
@@ -7378,7 +7386,7 @@
                             <a:noFill/>
                           </a:ln>
                           <a:solidFill>
-                            <a:prstClr val="black"/>
+                            <a:srgbClr val="FF0000"/>
                           </a:solidFill>
                           <a:effectLst/>
                           <a:uLnTx/>
@@ -7491,7 +7499,11 @@
                         <a:defRPr/>
                       </a:pPr>
                       <a:r>
-                        <a:rPr lang="en-US" altLang="ko-KR" sz="1100" dirty="0"/>
+                        <a:rPr lang="en-US" altLang="ko-KR" sz="1100" dirty="0">
+                          <a:solidFill>
+                            <a:srgbClr val="FF0000"/>
+                          </a:solidFill>
+                        </a:rPr>
                         <a:t>0.43</a:t>
                       </a:r>
                       <a:r>
@@ -7500,7 +7512,7 @@
                             <a:noFill/>
                           </a:ln>
                           <a:solidFill>
-                            <a:prstClr val="black"/>
+                            <a:srgbClr val="FF0000"/>
                           </a:solidFill>
                           <a:effectLst/>
                           <a:uLnTx/>
@@ -7512,7 +7524,11 @@
                         <a:t> ( </a:t>
                       </a:r>
                       <a:r>
-                        <a:rPr lang="en-US" altLang="ko-KR" sz="1100" dirty="0"/>
+                        <a:rPr lang="en-US" altLang="ko-KR" sz="1100" dirty="0">
+                          <a:solidFill>
+                            <a:srgbClr val="FF0000"/>
+                          </a:solidFill>
+                        </a:rPr>
                         <a:t>83.0</a:t>
                       </a:r>
                       <a:r>
@@ -7521,7 +7537,7 @@
                             <a:noFill/>
                           </a:ln>
                           <a:solidFill>
-                            <a:prstClr val="black"/>
+                            <a:srgbClr val="FF0000"/>
                           </a:solidFill>
                           <a:effectLst/>
                           <a:uLnTx/>
@@ -7927,7 +7943,11 @@
                         <a:defRPr/>
                       </a:pPr>
                       <a:r>
-                        <a:rPr lang="en-US" altLang="ko-KR" sz="1100" dirty="0"/>
+                        <a:rPr lang="en-US" altLang="ko-KR" sz="1100" dirty="0">
+                          <a:solidFill>
+                            <a:srgbClr val="FF0000"/>
+                          </a:solidFill>
+                        </a:rPr>
                         <a:t>-0.82</a:t>
                       </a:r>
                       <a:r>
@@ -7936,7 +7956,7 @@
                             <a:noFill/>
                           </a:ln>
                           <a:solidFill>
-                            <a:prstClr val="black"/>
+                            <a:srgbClr val="FF0000"/>
                           </a:solidFill>
                           <a:effectLst/>
                           <a:uLnTx/>
@@ -7948,7 +7968,11 @@
                         <a:t> ( </a:t>
                       </a:r>
                       <a:r>
-                        <a:rPr lang="en-US" altLang="ko-KR" sz="1100" dirty="0"/>
+                        <a:rPr lang="en-US" altLang="ko-KR" sz="1100" dirty="0">
+                          <a:solidFill>
+                            <a:srgbClr val="FF0000"/>
+                          </a:solidFill>
+                        </a:rPr>
                         <a:t>82.2</a:t>
                       </a:r>
                       <a:r>
@@ -7957,7 +7981,7 @@
                             <a:noFill/>
                           </a:ln>
                           <a:solidFill>
-                            <a:prstClr val="black"/>
+                            <a:srgbClr val="FF0000"/>
                           </a:solidFill>
                           <a:effectLst/>
                           <a:uLnTx/>
@@ -8498,7 +8522,11 @@
                         <a:defRPr/>
                       </a:pPr>
                       <a:r>
-                        <a:rPr lang="en-US" altLang="ko-KR" sz="1100" dirty="0"/>
+                        <a:rPr lang="en-US" altLang="ko-KR" sz="1100" dirty="0">
+                          <a:solidFill>
+                            <a:srgbClr val="FF0000"/>
+                          </a:solidFill>
+                        </a:rPr>
                         <a:t>-0.58</a:t>
                       </a:r>
                       <a:r>
@@ -8507,7 +8535,7 @@
                             <a:noFill/>
                           </a:ln>
                           <a:solidFill>
-                            <a:prstClr val="black"/>
+                            <a:srgbClr val="FF0000"/>
                           </a:solidFill>
                           <a:effectLst/>
                           <a:uLnTx/>
@@ -8519,7 +8547,11 @@
                         <a:t> ( </a:t>
                       </a:r>
                       <a:r>
-                        <a:rPr lang="en-US" altLang="ko-KR" sz="1100" dirty="0"/>
+                        <a:rPr lang="en-US" altLang="ko-KR" sz="1100" dirty="0">
+                          <a:solidFill>
+                            <a:srgbClr val="FF0000"/>
+                          </a:solidFill>
+                        </a:rPr>
                         <a:t>84.7</a:t>
                       </a:r>
                       <a:r>
@@ -8528,7 +8560,7 @@
                             <a:noFill/>
                           </a:ln>
                           <a:solidFill>
-                            <a:prstClr val="black"/>
+                            <a:srgbClr val="FF0000"/>
                           </a:solidFill>
                           <a:effectLst/>
                           <a:uLnTx/>
@@ -16636,7 +16668,7 @@
           <p:nvPr>
             <p:extLst>
               <p:ext uri="{D42A27DB-BD31-4B8C-83A1-F6EECF244321}">
-                <p14:modId xmlns:p14="http://schemas.microsoft.com/office/powerpoint/2010/main" val="862385646"/>
+                <p14:modId xmlns:p14="http://schemas.microsoft.com/office/powerpoint/2010/main" val="1797206486"/>
               </p:ext>
             </p:extLst>
           </p:nvPr>
@@ -16949,7 +16981,7 @@
                             <a:noFill/>
                           </a:ln>
                           <a:solidFill>
-                            <a:prstClr val="black"/>
+                            <a:srgbClr val="FF0000"/>
                           </a:solidFill>
                           <a:effectLst/>
                           <a:uLnTx/>
@@ -16958,7 +16990,7 @@
                           <a:ea typeface="+mn-ea"/>
                           <a:cs typeface="+mn-cs"/>
                         </a:rPr>
-                        <a:t>0.01</a:t>
+                        <a:t>-0.38</a:t>
                       </a:r>
                       <a:r>
                         <a:rPr kumimoji="0" lang="pt-BR" altLang="ko-KR" sz="1100" b="0" i="0" u="none" strike="noStrike" kern="1200" cap="none" spc="0" normalizeH="0" baseline="0" noProof="0" dirty="0">
@@ -16966,7 +16998,7 @@
                             <a:noFill/>
                           </a:ln>
                           <a:solidFill>
-                            <a:prstClr val="black"/>
+                            <a:srgbClr val="FF0000"/>
                           </a:solidFill>
                           <a:effectLst/>
                           <a:uLnTx/>
@@ -16975,7 +17007,7 @@
                           <a:ea typeface="+mn-ea"/>
                           <a:cs typeface="+mn-cs"/>
                         </a:rPr>
-                        <a:t> ( 99.8 </a:t>
+                        <a:t> ( 82.6 </a:t>
                       </a:r>
                       <a:r>
                         <a:rPr kumimoji="0" lang="pt-BR" altLang="ko-KR" sz="1100" b="0" i="0" u="none" strike="noStrike" kern="1200" cap="none" spc="0" normalizeH="0" baseline="0" noProof="0" dirty="0">
@@ -16983,7 +17015,7 @@
                             <a:noFill/>
                           </a:ln>
                           <a:solidFill>
-                            <a:prstClr val="black"/>
+                            <a:srgbClr val="FF0000"/>
                           </a:solidFill>
                           <a:effectLst/>
                           <a:uLnTx/>
@@ -17026,7 +17058,7 @@
                             <a:noFill/>
                           </a:ln>
                           <a:solidFill>
-                            <a:srgbClr val="FF0000"/>
+                            <a:prstClr val="black"/>
                           </a:solidFill>
                           <a:effectLst/>
                           <a:uLnTx/>
@@ -17035,7 +17067,7 @@
                           <a:ea typeface="+mn-ea"/>
                           <a:cs typeface="+mn-cs"/>
                         </a:rPr>
-                        <a:t>-0.38</a:t>
+                        <a:t>0.01</a:t>
                       </a:r>
                       <a:r>
                         <a:rPr kumimoji="0" lang="pt-BR" altLang="ko-KR" sz="1100" b="0" i="0" u="none" strike="noStrike" kern="1200" cap="none" spc="0" normalizeH="0" baseline="0" noProof="0" dirty="0">
@@ -17043,7 +17075,7 @@
                             <a:noFill/>
                           </a:ln>
                           <a:solidFill>
-                            <a:srgbClr val="FF0000"/>
+                            <a:prstClr val="black"/>
                           </a:solidFill>
                           <a:effectLst/>
                           <a:uLnTx/>
@@ -17052,7 +17084,7 @@
                           <a:ea typeface="+mn-ea"/>
                           <a:cs typeface="+mn-cs"/>
                         </a:rPr>
-                        <a:t> ( 82.6 </a:t>
+                        <a:t> ( 99.8 </a:t>
                       </a:r>
                       <a:r>
                         <a:rPr kumimoji="0" lang="pt-BR" altLang="ko-KR" sz="1100" b="0" i="0" u="none" strike="noStrike" kern="1200" cap="none" spc="0" normalizeH="0" baseline="0" noProof="0" dirty="0">
@@ -17060,7 +17092,7 @@
                             <a:noFill/>
                           </a:ln>
                           <a:solidFill>
-                            <a:srgbClr val="FF0000"/>
+                            <a:prstClr val="black"/>
                           </a:solidFill>
                           <a:effectLst/>
                           <a:uLnTx/>
@@ -17273,7 +17305,7 @@
                           <a:ea typeface="+mn-ea"/>
                           <a:cs typeface="+mn-cs"/>
                         </a:rPr>
-                        <a:t>0.09</a:t>
+                        <a:t>0.12</a:t>
                       </a:r>
                       <a:r>
                         <a:rPr kumimoji="0" lang="pt-BR" altLang="ko-KR" sz="1100" b="0" i="0" u="none" strike="noStrike" kern="1200" cap="none" spc="0" normalizeH="0" baseline="0" noProof="0" dirty="0">
@@ -17290,7 +17322,7 @@
                           <a:ea typeface="+mn-ea"/>
                           <a:cs typeface="+mn-cs"/>
                         </a:rPr>
-                        <a:t> ( 97.9 </a:t>
+                        <a:t> ( 95.4 </a:t>
                       </a:r>
                       <a:r>
                         <a:rPr kumimoji="0" lang="pt-BR" altLang="ko-KR" sz="1100" b="0" i="0" u="none" strike="noStrike" kern="1200" cap="none" spc="0" normalizeH="0" baseline="0" noProof="0" dirty="0">
@@ -17350,7 +17382,7 @@
                           <a:ea typeface="+mn-ea"/>
                           <a:cs typeface="+mn-cs"/>
                         </a:rPr>
-                        <a:t>0.12</a:t>
+                        <a:t>0.09</a:t>
                       </a:r>
                       <a:r>
                         <a:rPr kumimoji="0" lang="pt-BR" altLang="ko-KR" sz="1100" b="0" i="0" u="none" strike="noStrike" kern="1200" cap="none" spc="0" normalizeH="0" baseline="0" noProof="0" dirty="0">
@@ -17367,7 +17399,7 @@
                           <a:ea typeface="+mn-ea"/>
                           <a:cs typeface="+mn-cs"/>
                         </a:rPr>
-                        <a:t> ( 95.4 </a:t>
+                        <a:t> ( 97.9 </a:t>
                       </a:r>
                       <a:r>
                         <a:rPr kumimoji="0" lang="pt-BR" altLang="ko-KR" sz="1100" b="0" i="0" u="none" strike="noStrike" kern="1200" cap="none" spc="0" normalizeH="0" baseline="0" noProof="0" dirty="0">
@@ -17588,7 +17620,7 @@
                           <a:ea typeface="+mn-ea"/>
                           <a:cs typeface="+mn-cs"/>
                         </a:rPr>
-                        <a:t>-0.03</a:t>
+                        <a:t>0.03</a:t>
                       </a:r>
                       <a:r>
                         <a:rPr kumimoji="0" lang="pt-BR" altLang="ko-KR" sz="1100" b="0" i="0" u="none" strike="noStrike" kern="1200" cap="none" spc="0" normalizeH="0" baseline="0" noProof="0" dirty="0">
@@ -17605,7 +17637,7 @@
                           <a:ea typeface="+mn-ea"/>
                           <a:cs typeface="+mn-cs"/>
                         </a:rPr>
-                        <a:t> ( 98.4 </a:t>
+                        <a:t> ( 98.6  </a:t>
                       </a:r>
                       <a:r>
                         <a:rPr kumimoji="0" lang="pt-BR" altLang="ko-KR" sz="1100" b="0" i="0" u="none" strike="noStrike" kern="1200" cap="none" spc="0" normalizeH="0" baseline="0" noProof="0" dirty="0">
@@ -17665,7 +17697,7 @@
                           <a:ea typeface="+mn-ea"/>
                           <a:cs typeface="+mn-cs"/>
                         </a:rPr>
-                        <a:t>0.03</a:t>
+                        <a:t>-0.03</a:t>
                       </a:r>
                       <a:r>
                         <a:rPr kumimoji="0" lang="pt-BR" altLang="ko-KR" sz="1100" b="0" i="0" u="none" strike="noStrike" kern="1200" cap="none" spc="0" normalizeH="0" baseline="0" noProof="0" dirty="0">
@@ -17682,7 +17714,7 @@
                           <a:ea typeface="+mn-ea"/>
                           <a:cs typeface="+mn-cs"/>
                         </a:rPr>
-                        <a:t> ( 98.6  </a:t>
+                        <a:t> ( 98.4 </a:t>
                       </a:r>
                       <a:r>
                         <a:rPr kumimoji="0" lang="pt-BR" altLang="ko-KR" sz="1100" b="0" i="0" u="none" strike="noStrike" kern="1200" cap="none" spc="0" normalizeH="0" baseline="0" noProof="0" dirty="0">
@@ -17903,7 +17935,7 @@
                           <a:ea typeface="+mn-ea"/>
                           <a:cs typeface="+mn-cs"/>
                         </a:rPr>
-                        <a:t>-0.02</a:t>
+                        <a:t>-0.03</a:t>
                       </a:r>
                       <a:r>
                         <a:rPr kumimoji="0" lang="pt-BR" altLang="ko-KR" sz="1100" b="0" i="0" u="none" strike="noStrike" kern="1200" cap="none" spc="0" normalizeH="0" baseline="0" noProof="0" dirty="0">
@@ -17920,7 +17952,7 @@
                           <a:ea typeface="+mn-ea"/>
                           <a:cs typeface="+mn-cs"/>
                         </a:rPr>
-                        <a:t> ( 99.3 </a:t>
+                        <a:t> ( 97.8 </a:t>
                       </a:r>
                       <a:r>
                         <a:rPr kumimoji="0" lang="pt-BR" altLang="ko-KR" sz="1100" b="0" i="0" u="none" strike="noStrike" kern="1200" cap="none" spc="0" normalizeH="0" baseline="0" noProof="0" dirty="0">
@@ -17980,7 +18012,7 @@
                           <a:ea typeface="+mn-ea"/>
                           <a:cs typeface="+mn-cs"/>
                         </a:rPr>
-                        <a:t>-0.03</a:t>
+                        <a:t>-0.02</a:t>
                       </a:r>
                       <a:r>
                         <a:rPr kumimoji="0" lang="pt-BR" altLang="ko-KR" sz="1100" b="0" i="0" u="none" strike="noStrike" kern="1200" cap="none" spc="0" normalizeH="0" baseline="0" noProof="0" dirty="0">
@@ -17997,7 +18029,7 @@
                           <a:ea typeface="+mn-ea"/>
                           <a:cs typeface="+mn-cs"/>
                         </a:rPr>
-                        <a:t> ( 97.8 </a:t>
+                        <a:t> ( 99.3 </a:t>
                       </a:r>
                       <a:r>
                         <a:rPr kumimoji="0" lang="pt-BR" altLang="ko-KR" sz="1100" b="0" i="0" u="none" strike="noStrike" kern="1200" cap="none" spc="0" normalizeH="0" baseline="0" noProof="0" dirty="0">
@@ -18201,7 +18233,7 @@
                           <a:ea typeface="+mn-ea"/>
                           <a:cs typeface="+mn-cs"/>
                         </a:rPr>
-                        <a:t>0.01</a:t>
+                        <a:t>-0.16</a:t>
                       </a:r>
                       <a:r>
                         <a:rPr kumimoji="0" lang="pt-BR" altLang="ko-KR" sz="1100" b="0" i="0" u="none" strike="noStrike" kern="1200" cap="none" spc="0" normalizeH="0" baseline="0" noProof="0" dirty="0">
@@ -18218,7 +18250,7 @@
                           <a:ea typeface="+mn-ea"/>
                           <a:cs typeface="+mn-cs"/>
                         </a:rPr>
-                        <a:t> ( 99.3 </a:t>
+                        <a:t> ( 91.2 </a:t>
                       </a:r>
                       <a:r>
                         <a:rPr kumimoji="0" lang="pt-BR" altLang="ko-KR" sz="1100" b="0" i="0" u="none" strike="noStrike" kern="1200" cap="none" spc="0" normalizeH="0" baseline="0" noProof="0" dirty="0">
@@ -18278,7 +18310,7 @@
                           <a:ea typeface="+mn-ea"/>
                           <a:cs typeface="+mn-cs"/>
                         </a:rPr>
-                        <a:t>-0.16</a:t>
+                        <a:t>0.01</a:t>
                       </a:r>
                       <a:r>
                         <a:rPr kumimoji="0" lang="pt-BR" altLang="ko-KR" sz="1100" b="0" i="0" u="none" strike="noStrike" kern="1200" cap="none" spc="0" normalizeH="0" baseline="0" noProof="0" dirty="0">
@@ -18295,7 +18327,7 @@
                           <a:ea typeface="+mn-ea"/>
                           <a:cs typeface="+mn-cs"/>
                         </a:rPr>
-                        <a:t> ( 91.2 </a:t>
+                        <a:t> ( 99.3 </a:t>
                       </a:r>
                       <a:r>
                         <a:rPr kumimoji="0" lang="pt-BR" altLang="ko-KR" sz="1100" b="0" i="0" u="none" strike="noStrike" kern="1200" cap="none" spc="0" normalizeH="0" baseline="0" noProof="0" dirty="0">
@@ -18499,7 +18531,7 @@
                           <a:ea typeface="+mn-ea"/>
                           <a:cs typeface="+mn-cs"/>
                         </a:rPr>
-                        <a:t>-0.4</a:t>
+                        <a:t>-0.03</a:t>
                       </a:r>
                       <a:r>
                         <a:rPr kumimoji="0" lang="pt-BR" altLang="ko-KR" sz="1100" b="0" i="0" u="none" strike="noStrike" kern="1200" cap="none" spc="0" normalizeH="0" baseline="0" noProof="0" dirty="0">
@@ -18516,7 +18548,7 @@
                           <a:ea typeface="+mn-ea"/>
                           <a:cs typeface="+mn-cs"/>
                         </a:rPr>
-                        <a:t> ( 85.9 </a:t>
+                        <a:t> ( 98.3 </a:t>
                       </a:r>
                       <a:r>
                         <a:rPr kumimoji="0" lang="pt-BR" altLang="ko-KR" sz="1100" b="0" i="0" u="none" strike="noStrike" kern="1200" cap="none" spc="0" normalizeH="0" baseline="0" noProof="0" dirty="0">
@@ -18576,7 +18608,7 @@
                           <a:ea typeface="+mn-ea"/>
                           <a:cs typeface="+mn-cs"/>
                         </a:rPr>
-                        <a:t>-0.03</a:t>
+                        <a:t>-0.4</a:t>
                       </a:r>
                       <a:r>
                         <a:rPr kumimoji="0" lang="pt-BR" altLang="ko-KR" sz="1100" b="0" i="0" u="none" strike="noStrike" kern="1200" cap="none" spc="0" normalizeH="0" baseline="0" noProof="0" dirty="0">
@@ -18593,7 +18625,7 @@
                           <a:ea typeface="+mn-ea"/>
                           <a:cs typeface="+mn-cs"/>
                         </a:rPr>
-                        <a:t> ( 98.3 </a:t>
+                        <a:t> ( 85.9 </a:t>
                       </a:r>
                       <a:r>
                         <a:rPr kumimoji="0" lang="pt-BR" altLang="ko-KR" sz="1100" b="0" i="0" u="none" strike="noStrike" kern="1200" cap="none" spc="0" normalizeH="0" baseline="0" noProof="0" dirty="0">
@@ -26327,7 +26359,7 @@
           <p:nvPr>
             <p:extLst>
               <p:ext uri="{D42A27DB-BD31-4B8C-83A1-F6EECF244321}">
-                <p14:modId xmlns:p14="http://schemas.microsoft.com/office/powerpoint/2010/main" val="4184643588"/>
+                <p14:modId xmlns:p14="http://schemas.microsoft.com/office/powerpoint/2010/main" val="1990683712"/>
               </p:ext>
             </p:extLst>
           </p:nvPr>
@@ -27763,7 +27795,11 @@
                         <a:defRPr/>
                       </a:pPr>
                       <a:r>
-                        <a:rPr lang="en-US" altLang="ko-KR" sz="1100" dirty="0"/>
+                        <a:rPr lang="en-US" altLang="ko-KR" sz="1100" dirty="0">
+                          <a:solidFill>
+                            <a:srgbClr val="FF0000"/>
+                          </a:solidFill>
+                        </a:rPr>
                         <a:t>-0.27</a:t>
                       </a:r>
                       <a:r>
@@ -27772,7 +27808,7 @@
                             <a:noFill/>
                           </a:ln>
                           <a:solidFill>
-                            <a:prstClr val="black"/>
+                            <a:srgbClr val="FF0000"/>
                           </a:solidFill>
                           <a:effectLst/>
                           <a:uLnTx/>
@@ -27784,7 +27820,11 @@
                         <a:t> ( </a:t>
                       </a:r>
                       <a:r>
-                        <a:rPr lang="en-US" altLang="ko-KR" sz="1100" dirty="0"/>
+                        <a:rPr lang="en-US" altLang="ko-KR" sz="1100" dirty="0">
+                          <a:solidFill>
+                            <a:srgbClr val="FF0000"/>
+                          </a:solidFill>
+                        </a:rPr>
                         <a:t>84.7</a:t>
                       </a:r>
                       <a:r>
@@ -27793,7 +27833,7 @@
                             <a:noFill/>
                           </a:ln>
                           <a:solidFill>
-                            <a:prstClr val="black"/>
+                            <a:srgbClr val="FF0000"/>
                           </a:solidFill>
                           <a:effectLst/>
                           <a:uLnTx/>
@@ -35513,7 +35553,7 @@
           <p:nvPr>
             <p:extLst>
               <p:ext uri="{D42A27DB-BD31-4B8C-83A1-F6EECF244321}">
-                <p14:modId xmlns:p14="http://schemas.microsoft.com/office/powerpoint/2010/main" val="324100064"/>
+                <p14:modId xmlns:p14="http://schemas.microsoft.com/office/powerpoint/2010/main" val="1738349860"/>
               </p:ext>
             </p:extLst>
           </p:nvPr>
@@ -35827,7 +35867,11 @@
                         <a:defRPr/>
                       </a:pPr>
                       <a:r>
-                        <a:rPr lang="en-US" altLang="ko-KR" sz="1100" dirty="0"/>
+                        <a:rPr lang="en-US" altLang="ko-KR" sz="1100" dirty="0">
+                          <a:solidFill>
+                            <a:srgbClr val="FF0000"/>
+                          </a:solidFill>
+                        </a:rPr>
                         <a:t>-0.69</a:t>
                       </a:r>
                       <a:r>
@@ -35836,7 +35880,7 @@
                             <a:noFill/>
                           </a:ln>
                           <a:solidFill>
-                            <a:prstClr val="black"/>
+                            <a:srgbClr val="FF0000"/>
                           </a:solidFill>
                           <a:effectLst/>
                           <a:uLnTx/>
@@ -35848,7 +35892,11 @@
                         <a:t> ( </a:t>
                       </a:r>
                       <a:r>
-                        <a:rPr lang="en-US" altLang="ko-KR" sz="1100" dirty="0"/>
+                        <a:rPr lang="en-US" altLang="ko-KR" sz="1100" dirty="0">
+                          <a:solidFill>
+                            <a:srgbClr val="FF0000"/>
+                          </a:solidFill>
+                        </a:rPr>
                         <a:t>80.7</a:t>
                       </a:r>
                       <a:r>
@@ -35857,7 +35905,7 @@
                             <a:noFill/>
                           </a:ln>
                           <a:solidFill>
-                            <a:prstClr val="black"/>
+                            <a:srgbClr val="FF0000"/>
                           </a:solidFill>
                           <a:effectLst/>
                           <a:uLnTx/>
@@ -36643,7 +36691,11 @@
                         <a:defRPr/>
                       </a:pPr>
                       <a:r>
-                        <a:rPr lang="en-US" altLang="ko-KR" sz="1100" dirty="0"/>
+                        <a:rPr lang="en-US" altLang="ko-KR" sz="1100" dirty="0">
+                          <a:solidFill>
+                            <a:srgbClr val="FF0000"/>
+                          </a:solidFill>
+                        </a:rPr>
                         <a:t>-0.45</a:t>
                       </a:r>
                       <a:r>
@@ -36652,7 +36704,7 @@
                             <a:noFill/>
                           </a:ln>
                           <a:solidFill>
-                            <a:prstClr val="black"/>
+                            <a:srgbClr val="FF0000"/>
                           </a:solidFill>
                           <a:effectLst/>
                           <a:uLnTx/>
@@ -36664,7 +36716,11 @@
                         <a:t> ( </a:t>
                       </a:r>
                       <a:r>
-                        <a:rPr lang="en-US" altLang="ko-KR" sz="1100" dirty="0"/>
+                        <a:rPr lang="en-US" altLang="ko-KR" sz="1100" dirty="0">
+                          <a:solidFill>
+                            <a:srgbClr val="FF0000"/>
+                          </a:solidFill>
+                        </a:rPr>
                         <a:t>84.2</a:t>
                       </a:r>
                       <a:r>
@@ -36673,7 +36729,7 @@
                             <a:noFill/>
                           </a:ln>
                           <a:solidFill>
-                            <a:prstClr val="black"/>
+                            <a:srgbClr val="FF0000"/>
                           </a:solidFill>
                           <a:effectLst/>
                           <a:uLnTx/>
